--- a/论文图片/图片转pdf/第二章/光栅化阶段处理流程图.pptx
+++ b/论文图片/图片转pdf/第二章/光栅化阶段处理流程图.pptx
@@ -2930,137 +2930,112 @@
         <p:nvPr/>
       </p:nvGrpSpPr>
       <p:grpSpPr/>
-      <p:grpSp>
-        <p:nvGrpSpPr>
-          <p:cNvPr id="15" name="组合 14"/>
-          <p:cNvGrpSpPr/>
+      <p:sp>
+        <p:nvSpPr>
+          <p:cNvPr id="27" name="矩形 26"/>
+          <p:cNvSpPr/>
           <p:nvPr/>
-        </p:nvGrpSpPr>
-        <p:grpSpPr>
+        </p:nvSpPr>
+        <p:spPr>
           <a:xfrm>
-            <a:off x="131405" y="45630"/>
-            <a:ext cx="10487025" cy="1362710"/>
-            <a:chOff x="1275" y="2252"/>
-            <a:chExt cx="16515" cy="2146"/>
+            <a:off x="131445" y="45720"/>
+            <a:ext cx="8760460" cy="1362710"/>
           </a:xfrm>
-        </p:grpSpPr>
-        <p:sp>
-          <p:nvSpPr>
-            <p:cNvPr id="27" name="矩形 26"/>
-            <p:cNvSpPr/>
-            <p:nvPr/>
-          </p:nvSpPr>
-          <p:spPr>
-            <a:xfrm>
-              <a:off x="1275" y="2252"/>
-              <a:ext cx="13796" cy="2146"/>
-            </a:xfrm>
-            <a:prstGeom prst="rect">
-              <a:avLst/>
-            </a:prstGeom>
+          <a:prstGeom prst="rect">
+            <a:avLst/>
+          </a:prstGeom>
+          <a:solidFill>
+            <a:srgbClr val="E6F1E0"/>
+          </a:solidFill>
+          <a:ln>
             <a:solidFill>
-              <a:srgbClr val="E6F1E0"/>
+              <a:schemeClr val="tx1"/>
             </a:solidFill>
-            <a:ln>
-              <a:solidFill>
-                <a:schemeClr val="tx1"/>
-              </a:solidFill>
-            </a:ln>
-          </p:spPr>
-          <p:style>
-            <a:lnRef idx="2">
-              <a:schemeClr val="accent1">
-                <a:lumMod val="75000"/>
-              </a:schemeClr>
-            </a:lnRef>
-            <a:fillRef idx="1">
-              <a:schemeClr val="accent1"/>
-            </a:fillRef>
-            <a:effectRef idx="0">
-              <a:srgbClr val="FFFFFF"/>
-            </a:effectRef>
-            <a:fontRef idx="minor">
-              <a:schemeClr val="lt1"/>
-            </a:fontRef>
-          </p:style>
-          <p:txBody>
-            <a:bodyPr vertOverflow="overflow" horzOverflow="overflow" vert="horz" wrap="square" numCol="1" spcCol="0" rtlCol="0" fromWordArt="0" anchor="ctr" anchorCtr="0" forceAA="0" compatLnSpc="1">
-              <a:noAutofit/>
-            </a:bodyPr>
-            <a:p>
-              <a:pPr lvl="0" algn="ctr">
-                <a:buClrTx/>
-                <a:buSzTx/>
-                <a:buFontTx/>
-              </a:pPr>
-              <a:endParaRPr lang="zh-CN" altLang="en-US" sz="1600">
-                <a:sym typeface="+mn-ea"/>
-              </a:endParaRPr>
-            </a:p>
-          </p:txBody>
-        </p:sp>
-        <p:sp>
-          <p:nvSpPr>
-            <p:cNvPr id="13" name="矩形 12"/>
-            <p:cNvSpPr/>
-            <p:nvPr/>
-          </p:nvSpPr>
-          <p:spPr>
-            <a:xfrm>
-              <a:off x="1572" y="3170"/>
-              <a:ext cx="1951" cy="687"/>
-            </a:xfrm>
-            <a:prstGeom prst="rect">
-              <a:avLst/>
-            </a:prstGeom>
+          </a:ln>
+        </p:spPr>
+        <p:style>
+          <a:lnRef idx="2">
+            <a:schemeClr val="accent1">
+              <a:lumMod val="75000"/>
+            </a:schemeClr>
+          </a:lnRef>
+          <a:fillRef idx="1">
+            <a:schemeClr val="accent1"/>
+          </a:fillRef>
+          <a:effectRef idx="0">
+            <a:srgbClr val="FFFFFF"/>
+          </a:effectRef>
+          <a:fontRef idx="minor">
+            <a:schemeClr val="lt1"/>
+          </a:fontRef>
+        </p:style>
+        <p:txBody>
+          <a:bodyPr vertOverflow="overflow" horzOverflow="overflow" vert="horz" wrap="square" numCol="1" spcCol="0" rtlCol="0" fromWordArt="0" anchor="ctr" anchorCtr="0" forceAA="0" compatLnSpc="1">
+            <a:noAutofit/>
+          </a:bodyPr>
+          <a:p>
+            <a:pPr lvl="0" algn="ctr">
+              <a:buClrTx/>
+              <a:buSzTx/>
+              <a:buFontTx/>
+            </a:pPr>
+            <a:endParaRPr lang="zh-CN" altLang="en-US" sz="1600">
+              <a:sym typeface="+mn-ea"/>
+            </a:endParaRPr>
+          </a:p>
+        </p:txBody>
+      </p:sp>
+      <p:sp>
+        <p:nvSpPr>
+          <p:cNvPr id="13" name="矩形 12"/>
+          <p:cNvSpPr/>
+          <p:nvPr/>
+        </p:nvSpPr>
+        <p:spPr>
+          <a:xfrm>
+            <a:off x="320040" y="628650"/>
+            <a:ext cx="1238885" cy="436245"/>
+          </a:xfrm>
+          <a:prstGeom prst="rect">
+            <a:avLst/>
+          </a:prstGeom>
+          <a:solidFill>
+            <a:srgbClr val="C5DFB2"/>
+          </a:solidFill>
+          <a:ln>
             <a:solidFill>
-              <a:srgbClr val="C5DFB2"/>
+              <a:schemeClr val="tx1"/>
             </a:solidFill>
-            <a:ln>
-              <a:solidFill>
-                <a:schemeClr val="tx1"/>
-              </a:solidFill>
-            </a:ln>
-          </p:spPr>
-          <p:style>
-            <a:lnRef idx="2">
-              <a:schemeClr val="accent1">
-                <a:lumMod val="75000"/>
-              </a:schemeClr>
-            </a:lnRef>
-            <a:fillRef idx="1">
-              <a:schemeClr val="accent1"/>
-            </a:fillRef>
-            <a:effectRef idx="0">
-              <a:srgbClr val="FFFFFF"/>
-            </a:effectRef>
-            <a:fontRef idx="minor">
-              <a:schemeClr val="lt1"/>
-            </a:fontRef>
-          </p:style>
-          <p:txBody>
-            <a:bodyPr vertOverflow="overflow" horzOverflow="overflow" vert="horz" wrap="square" numCol="1" spcCol="0" rtlCol="0" fromWordArt="0" anchor="ctr" anchorCtr="0" forceAA="0" compatLnSpc="1">
-              <a:noAutofit/>
-            </a:bodyPr>
-            <a:p>
-              <a:pPr lvl="0" algn="ctr">
-                <a:buClrTx/>
-                <a:buSzTx/>
-                <a:buFontTx/>
-              </a:pPr>
-              <a:r>
-                <a:rPr lang="zh-CN" altLang="en-US" sz="1600" b="1">
-                  <a:solidFill>
-                    <a:schemeClr val="tx1"/>
-                  </a:solidFill>
-                  <a:latin typeface="Times New Roman" panose="02020603050405020304" charset="0"/>
-                  <a:ea typeface="宋体" panose="02010600030101010101" pitchFamily="2" charset="-122"/>
-                  <a:cs typeface="Times New Roman" panose="02020603050405020304" charset="0"/>
-                  <a:sym typeface="+mn-ea"/>
-                </a:rPr>
-                <a:t>三角形设置</a:t>
-              </a:r>
-              <a:endParaRPr lang="zh-CN" altLang="en-US" sz="1600" b="1">
+          </a:ln>
+        </p:spPr>
+        <p:style>
+          <a:lnRef idx="2">
+            <a:schemeClr val="accent1">
+              <a:lumMod val="75000"/>
+            </a:schemeClr>
+          </a:lnRef>
+          <a:fillRef idx="1">
+            <a:schemeClr val="accent1"/>
+          </a:fillRef>
+          <a:effectRef idx="0">
+            <a:srgbClr val="FFFFFF"/>
+          </a:effectRef>
+          <a:fontRef idx="minor">
+            <a:schemeClr val="lt1"/>
+          </a:fontRef>
+        </p:style>
+        <p:txBody>
+          <a:bodyPr vertOverflow="overflow" horzOverflow="overflow" vert="horz" wrap="square" numCol="1" spcCol="0" rtlCol="0" fromWordArt="0" anchor="ctr" anchorCtr="0" forceAA="0" compatLnSpc="1">
+            <a:noAutofit/>
+          </a:bodyPr>
+          <a:p>
+            <a:pPr lvl="0" algn="ctr">
+              <a:buClrTx/>
+              <a:buSzTx/>
+              <a:buFontTx/>
+            </a:pPr>
+            <a:r>
+              <a:rPr lang="zh-CN" altLang="en-US" sz="1600">
                 <a:solidFill>
                   <a:schemeClr val="tx1"/>
                 </a:solidFill>
@@ -3068,72 +3043,72 @@
                 <a:ea typeface="宋体" panose="02010600030101010101" pitchFamily="2" charset="-122"/>
                 <a:cs typeface="Times New Roman" panose="02020603050405020304" charset="0"/>
                 <a:sym typeface="+mn-ea"/>
-              </a:endParaRPr>
-            </a:p>
-          </p:txBody>
-        </p:sp>
-        <p:sp>
-          <p:nvSpPr>
-            <p:cNvPr id="7" name="矩形 6"/>
-            <p:cNvSpPr/>
-            <p:nvPr/>
-          </p:nvSpPr>
-          <p:spPr>
-            <a:xfrm>
-              <a:off x="5126" y="3170"/>
-              <a:ext cx="1951" cy="687"/>
-            </a:xfrm>
-            <a:prstGeom prst="rect">
-              <a:avLst/>
-            </a:prstGeom>
-            <a:solidFill>
-              <a:srgbClr val="C5DFB2"/>
-            </a:solidFill>
-            <a:ln>
+              </a:rPr>
+              <a:t>三角形设置</a:t>
+            </a:r>
+            <a:endParaRPr lang="zh-CN" altLang="en-US" sz="1600">
               <a:solidFill>
                 <a:schemeClr val="tx1"/>
               </a:solidFill>
-            </a:ln>
-          </p:spPr>
-          <p:style>
-            <a:lnRef idx="2">
-              <a:schemeClr val="accent1">
-                <a:lumMod val="75000"/>
-              </a:schemeClr>
-            </a:lnRef>
-            <a:fillRef idx="1">
-              <a:schemeClr val="accent1"/>
-            </a:fillRef>
-            <a:effectRef idx="0">
-              <a:srgbClr val="FFFFFF"/>
-            </a:effectRef>
-            <a:fontRef idx="minor">
-              <a:schemeClr val="lt1"/>
-            </a:fontRef>
-          </p:style>
-          <p:txBody>
-            <a:bodyPr vertOverflow="overflow" horzOverflow="overflow" vert="horz" wrap="square" numCol="1" spcCol="0" rtlCol="0" fromWordArt="0" anchor="ctr" anchorCtr="0" forceAA="0" compatLnSpc="1">
-              <a:noAutofit/>
-            </a:bodyPr>
-            <a:p>
-              <a:pPr lvl="0" algn="ctr">
-                <a:buClrTx/>
-                <a:buSzTx/>
-                <a:buFontTx/>
-              </a:pPr>
-              <a:r>
-                <a:rPr lang="zh-CN" altLang="en-US" sz="1600" b="1">
-                  <a:solidFill>
-                    <a:schemeClr val="tx1"/>
-                  </a:solidFill>
-                  <a:latin typeface="Times New Roman" panose="02020603050405020304" charset="0"/>
-                  <a:ea typeface="宋体" panose="02010600030101010101" pitchFamily="2" charset="-122"/>
-                  <a:cs typeface="Times New Roman" panose="02020603050405020304" charset="0"/>
-                  <a:sym typeface="+mn-ea"/>
-                </a:rPr>
-                <a:t>三角形遍历</a:t>
-              </a:r>
-              <a:endParaRPr lang="zh-CN" altLang="en-US" sz="1600" b="1">
+              <a:latin typeface="Times New Roman" panose="02020603050405020304" charset="0"/>
+              <a:ea typeface="宋体" panose="02010600030101010101" pitchFamily="2" charset="-122"/>
+              <a:cs typeface="Times New Roman" panose="02020603050405020304" charset="0"/>
+              <a:sym typeface="+mn-ea"/>
+            </a:endParaRPr>
+          </a:p>
+        </p:txBody>
+      </p:sp>
+      <p:sp>
+        <p:nvSpPr>
+          <p:cNvPr id="7" name="矩形 6"/>
+          <p:cNvSpPr/>
+          <p:nvPr/>
+        </p:nvSpPr>
+        <p:spPr>
+          <a:xfrm>
+            <a:off x="2576830" y="628650"/>
+            <a:ext cx="1238885" cy="436245"/>
+          </a:xfrm>
+          <a:prstGeom prst="rect">
+            <a:avLst/>
+          </a:prstGeom>
+          <a:solidFill>
+            <a:srgbClr val="C5DFB2"/>
+          </a:solidFill>
+          <a:ln>
+            <a:solidFill>
+              <a:schemeClr val="tx1"/>
+            </a:solidFill>
+          </a:ln>
+        </p:spPr>
+        <p:style>
+          <a:lnRef idx="2">
+            <a:schemeClr val="accent1">
+              <a:lumMod val="75000"/>
+            </a:schemeClr>
+          </a:lnRef>
+          <a:fillRef idx="1">
+            <a:schemeClr val="accent1"/>
+          </a:fillRef>
+          <a:effectRef idx="0">
+            <a:srgbClr val="FFFFFF"/>
+          </a:effectRef>
+          <a:fontRef idx="minor">
+            <a:schemeClr val="lt1"/>
+          </a:fontRef>
+        </p:style>
+        <p:txBody>
+          <a:bodyPr vertOverflow="overflow" horzOverflow="overflow" vert="horz" wrap="square" numCol="1" spcCol="0" rtlCol="0" fromWordArt="0" anchor="ctr" anchorCtr="0" forceAA="0" compatLnSpc="1">
+            <a:noAutofit/>
+          </a:bodyPr>
+          <a:p>
+            <a:pPr lvl="0" algn="ctr">
+              <a:buClrTx/>
+              <a:buSzTx/>
+              <a:buFontTx/>
+            </a:pPr>
+            <a:r>
+              <a:rPr lang="zh-CN" altLang="en-US" sz="1600">
                 <a:solidFill>
                   <a:schemeClr val="tx1"/>
                 </a:solidFill>
@@ -3141,112 +3116,112 @@
                 <a:ea typeface="宋体" panose="02010600030101010101" pitchFamily="2" charset="-122"/>
                 <a:cs typeface="Times New Roman" panose="02020603050405020304" charset="0"/>
                 <a:sym typeface="+mn-ea"/>
-              </a:endParaRPr>
-            </a:p>
-          </p:txBody>
-        </p:sp>
-        <p:cxnSp>
-          <p:nvCxnSpPr>
-            <p:cNvPr id="17" name="直接箭头连接符 16"/>
-            <p:cNvCxnSpPr>
-              <a:stCxn id="13" idx="3"/>
-              <a:endCxn id="7" idx="1"/>
-            </p:cNvCxnSpPr>
-            <p:nvPr/>
-          </p:nvCxnSpPr>
-          <p:spPr>
-            <a:xfrm>
-              <a:off x="3523" y="3514"/>
-              <a:ext cx="1603" cy="0"/>
-            </a:xfrm>
-            <a:prstGeom prst="straightConnector1">
-              <a:avLst/>
-            </a:prstGeom>
-            <a:ln w="19050">
+              </a:rPr>
+              <a:t>三角形遍历</a:t>
+            </a:r>
+            <a:endParaRPr lang="zh-CN" altLang="en-US" sz="1600">
               <a:solidFill>
                 <a:schemeClr val="tx1"/>
               </a:solidFill>
-              <a:headEnd type="none"/>
-              <a:tailEnd type="triangle" w="med" len="med"/>
-            </a:ln>
-          </p:spPr>
-          <p:style>
-            <a:lnRef idx="2">
-              <a:schemeClr val="accent1"/>
-            </a:lnRef>
-            <a:fillRef idx="0">
-              <a:srgbClr val="FFFFFF"/>
-            </a:fillRef>
-            <a:effectRef idx="0">
-              <a:srgbClr val="FFFFFF"/>
-            </a:effectRef>
-            <a:fontRef idx="minor">
+              <a:latin typeface="Times New Roman" panose="02020603050405020304" charset="0"/>
+              <a:ea typeface="宋体" panose="02010600030101010101" pitchFamily="2" charset="-122"/>
+              <a:cs typeface="Times New Roman" panose="02020603050405020304" charset="0"/>
+              <a:sym typeface="+mn-ea"/>
+            </a:endParaRPr>
+          </a:p>
+        </p:txBody>
+      </p:sp>
+      <p:cxnSp>
+        <p:nvCxnSpPr>
+          <p:cNvPr id="17" name="直接箭头连接符 16"/>
+          <p:cNvCxnSpPr>
+            <a:stCxn id="13" idx="3"/>
+            <a:endCxn id="7" idx="1"/>
+          </p:cNvCxnSpPr>
+          <p:nvPr/>
+        </p:nvCxnSpPr>
+        <p:spPr>
+          <a:xfrm>
+            <a:off x="1558925" y="847090"/>
+            <a:ext cx="1017905" cy="0"/>
+          </a:xfrm>
+          <a:prstGeom prst="straightConnector1">
+            <a:avLst/>
+          </a:prstGeom>
+          <a:ln w="19050">
+            <a:solidFill>
               <a:schemeClr val="tx1"/>
-            </a:fontRef>
-          </p:style>
-        </p:cxnSp>
-        <p:sp>
-          <p:nvSpPr>
-            <p:cNvPr id="10" name="矩形 9"/>
-            <p:cNvSpPr/>
-            <p:nvPr/>
-          </p:nvSpPr>
-          <p:spPr>
-            <a:xfrm>
-              <a:off x="8680" y="3170"/>
-              <a:ext cx="1951" cy="687"/>
-            </a:xfrm>
-            <a:prstGeom prst="rect">
-              <a:avLst/>
-            </a:prstGeom>
+            </a:solidFill>
+            <a:headEnd type="none"/>
+            <a:tailEnd type="triangle" w="med" len="med"/>
+          </a:ln>
+        </p:spPr>
+        <p:style>
+          <a:lnRef idx="2">
+            <a:schemeClr val="accent1"/>
+          </a:lnRef>
+          <a:fillRef idx="0">
+            <a:srgbClr val="FFFFFF"/>
+          </a:fillRef>
+          <a:effectRef idx="0">
+            <a:srgbClr val="FFFFFF"/>
+          </a:effectRef>
+          <a:fontRef idx="minor">
+            <a:schemeClr val="tx1"/>
+          </a:fontRef>
+        </p:style>
+      </p:cxnSp>
+      <p:sp>
+        <p:nvSpPr>
+          <p:cNvPr id="10" name="矩形 9"/>
+          <p:cNvSpPr/>
+          <p:nvPr/>
+        </p:nvSpPr>
+        <p:spPr>
+          <a:xfrm>
+            <a:off x="4833620" y="628650"/>
+            <a:ext cx="1238885" cy="436245"/>
+          </a:xfrm>
+          <a:prstGeom prst="rect">
+            <a:avLst/>
+          </a:prstGeom>
+          <a:solidFill>
+            <a:srgbClr val="C5DFB2"/>
+          </a:solidFill>
+          <a:ln>
             <a:solidFill>
-              <a:srgbClr val="C5DFB2"/>
+              <a:schemeClr val="tx1"/>
             </a:solidFill>
-            <a:ln>
-              <a:solidFill>
-                <a:schemeClr val="tx1"/>
-              </a:solidFill>
-            </a:ln>
-          </p:spPr>
-          <p:style>
-            <a:lnRef idx="2">
-              <a:schemeClr val="accent1">
-                <a:lumMod val="75000"/>
-              </a:schemeClr>
-            </a:lnRef>
-            <a:fillRef idx="1">
-              <a:schemeClr val="accent1"/>
-            </a:fillRef>
-            <a:effectRef idx="0">
-              <a:srgbClr val="FFFFFF"/>
-            </a:effectRef>
-            <a:fontRef idx="minor">
-              <a:schemeClr val="lt1"/>
-            </a:fontRef>
-          </p:style>
-          <p:txBody>
-            <a:bodyPr vertOverflow="overflow" horzOverflow="overflow" vert="horz" wrap="square" numCol="1" spcCol="0" rtlCol="0" fromWordArt="0" anchor="ctr" anchorCtr="0" forceAA="0" compatLnSpc="1">
-              <a:noAutofit/>
-            </a:bodyPr>
-            <a:p>
-              <a:pPr lvl="0" algn="ctr">
-                <a:buClrTx/>
-                <a:buSzTx/>
-                <a:buFontTx/>
-              </a:pPr>
-              <a:r>
-                <a:rPr lang="zh-CN" altLang="en-US" sz="1600" b="1">
-                  <a:solidFill>
-                    <a:schemeClr val="tx1"/>
-                  </a:solidFill>
-                  <a:latin typeface="Times New Roman" panose="02020603050405020304" charset="0"/>
-                  <a:ea typeface="宋体" panose="02010600030101010101" pitchFamily="2" charset="-122"/>
-                  <a:cs typeface="Times New Roman" panose="02020603050405020304" charset="0"/>
-                  <a:sym typeface="+mn-ea"/>
-                </a:rPr>
-                <a:t>片元着色器</a:t>
-              </a:r>
-              <a:endParaRPr lang="zh-CN" altLang="en-US" sz="1600" b="1">
+          </a:ln>
+        </p:spPr>
+        <p:style>
+          <a:lnRef idx="2">
+            <a:schemeClr val="accent1">
+              <a:lumMod val="75000"/>
+            </a:schemeClr>
+          </a:lnRef>
+          <a:fillRef idx="1">
+            <a:schemeClr val="accent1"/>
+          </a:fillRef>
+          <a:effectRef idx="0">
+            <a:srgbClr val="FFFFFF"/>
+          </a:effectRef>
+          <a:fontRef idx="minor">
+            <a:schemeClr val="lt1"/>
+          </a:fontRef>
+        </p:style>
+        <p:txBody>
+          <a:bodyPr vertOverflow="overflow" horzOverflow="overflow" vert="horz" wrap="square" numCol="1" spcCol="0" rtlCol="0" fromWordArt="0" anchor="ctr" anchorCtr="0" forceAA="0" compatLnSpc="1">
+            <a:noAutofit/>
+          </a:bodyPr>
+          <a:p>
+            <a:pPr lvl="0" algn="ctr">
+              <a:buClrTx/>
+              <a:buSzTx/>
+              <a:buFontTx/>
+            </a:pPr>
+            <a:r>
+              <a:rPr lang="zh-CN" altLang="en-US" sz="1600">
                 <a:solidFill>
                   <a:schemeClr val="tx1"/>
                 </a:solidFill>
@@ -3254,111 +3229,111 @@
                 <a:ea typeface="宋体" panose="02010600030101010101" pitchFamily="2" charset="-122"/>
                 <a:cs typeface="Times New Roman" panose="02020603050405020304" charset="0"/>
                 <a:sym typeface="+mn-ea"/>
-              </a:endParaRPr>
-            </a:p>
-          </p:txBody>
-        </p:sp>
-        <p:cxnSp>
-          <p:nvCxnSpPr>
-            <p:cNvPr id="11" name="直接箭头连接符 10"/>
-            <p:cNvCxnSpPr>
-              <a:endCxn id="10" idx="1"/>
-            </p:cNvCxnSpPr>
-            <p:nvPr/>
-          </p:nvCxnSpPr>
-          <p:spPr>
-            <a:xfrm>
-              <a:off x="7077" y="3514"/>
-              <a:ext cx="1603" cy="0"/>
-            </a:xfrm>
-            <a:prstGeom prst="straightConnector1">
-              <a:avLst/>
-            </a:prstGeom>
-            <a:ln w="19050">
+              </a:rPr>
+              <a:t>片元着色器</a:t>
+            </a:r>
+            <a:endParaRPr lang="zh-CN" altLang="en-US" sz="1600">
               <a:solidFill>
                 <a:schemeClr val="tx1"/>
               </a:solidFill>
-              <a:headEnd type="none"/>
-              <a:tailEnd type="triangle" w="med" len="med"/>
-            </a:ln>
-          </p:spPr>
-          <p:style>
-            <a:lnRef idx="2">
-              <a:schemeClr val="accent1"/>
-            </a:lnRef>
-            <a:fillRef idx="0">
-              <a:srgbClr val="FFFFFF"/>
-            </a:fillRef>
-            <a:effectRef idx="0">
-              <a:srgbClr val="FFFFFF"/>
-            </a:effectRef>
-            <a:fontRef idx="minor">
+              <a:latin typeface="Times New Roman" panose="02020603050405020304" charset="0"/>
+              <a:ea typeface="宋体" panose="02010600030101010101" pitchFamily="2" charset="-122"/>
+              <a:cs typeface="Times New Roman" panose="02020603050405020304" charset="0"/>
+              <a:sym typeface="+mn-ea"/>
+            </a:endParaRPr>
+          </a:p>
+        </p:txBody>
+      </p:sp>
+      <p:cxnSp>
+        <p:nvCxnSpPr>
+          <p:cNvPr id="11" name="直接箭头连接符 10"/>
+          <p:cNvCxnSpPr>
+            <a:endCxn id="10" idx="1"/>
+          </p:cNvCxnSpPr>
+          <p:nvPr/>
+        </p:nvCxnSpPr>
+        <p:spPr>
+          <a:xfrm>
+            <a:off x="3815715" y="847090"/>
+            <a:ext cx="1017905" cy="0"/>
+          </a:xfrm>
+          <a:prstGeom prst="straightConnector1">
+            <a:avLst/>
+          </a:prstGeom>
+          <a:ln w="19050">
+            <a:solidFill>
               <a:schemeClr val="tx1"/>
-            </a:fontRef>
-          </p:style>
-        </p:cxnSp>
-        <p:sp>
-          <p:nvSpPr>
-            <p:cNvPr id="19" name="矩形 18"/>
-            <p:cNvSpPr/>
-            <p:nvPr/>
-          </p:nvSpPr>
-          <p:spPr>
-            <a:xfrm>
-              <a:off x="12234" y="3170"/>
-              <a:ext cx="2008" cy="687"/>
-            </a:xfrm>
-            <a:prstGeom prst="rect">
-              <a:avLst/>
-            </a:prstGeom>
+            </a:solidFill>
+            <a:headEnd type="none"/>
+            <a:tailEnd type="triangle" w="med" len="med"/>
+          </a:ln>
+        </p:spPr>
+        <p:style>
+          <a:lnRef idx="2">
+            <a:schemeClr val="accent1"/>
+          </a:lnRef>
+          <a:fillRef idx="0">
+            <a:srgbClr val="FFFFFF"/>
+          </a:fillRef>
+          <a:effectRef idx="0">
+            <a:srgbClr val="FFFFFF"/>
+          </a:effectRef>
+          <a:fontRef idx="minor">
+            <a:schemeClr val="tx1"/>
+          </a:fontRef>
+        </p:style>
+      </p:cxnSp>
+      <p:sp>
+        <p:nvSpPr>
+          <p:cNvPr id="19" name="矩形 18"/>
+          <p:cNvSpPr/>
+          <p:nvPr/>
+        </p:nvSpPr>
+        <p:spPr>
+          <a:xfrm>
+            <a:off x="7090410" y="628650"/>
+            <a:ext cx="1275080" cy="436245"/>
+          </a:xfrm>
+          <a:prstGeom prst="rect">
+            <a:avLst/>
+          </a:prstGeom>
+          <a:solidFill>
+            <a:srgbClr val="C5DFB2"/>
+          </a:solidFill>
+          <a:ln>
             <a:solidFill>
-              <a:srgbClr val="C5DFB2"/>
+              <a:schemeClr val="tx1"/>
             </a:solidFill>
-            <a:ln>
-              <a:solidFill>
-                <a:schemeClr val="tx1"/>
-              </a:solidFill>
-            </a:ln>
-          </p:spPr>
-          <p:style>
-            <a:lnRef idx="2">
-              <a:schemeClr val="accent1">
-                <a:lumMod val="75000"/>
-              </a:schemeClr>
-            </a:lnRef>
-            <a:fillRef idx="1">
-              <a:schemeClr val="accent1"/>
-            </a:fillRef>
-            <a:effectRef idx="0">
-              <a:srgbClr val="FFFFFF"/>
-            </a:effectRef>
-            <a:fontRef idx="minor">
-              <a:schemeClr val="lt1"/>
-            </a:fontRef>
-          </p:style>
-          <p:txBody>
-            <a:bodyPr vertOverflow="overflow" horzOverflow="overflow" vert="horz" wrap="square" numCol="1" spcCol="0" rtlCol="0" fromWordArt="0" anchor="ctr" anchorCtr="0" forceAA="0" compatLnSpc="1">
-              <a:noAutofit/>
-            </a:bodyPr>
-            <a:p>
-              <a:pPr lvl="0" algn="ctr">
-                <a:buClrTx/>
-                <a:buSzTx/>
-                <a:buFontTx/>
-              </a:pPr>
-              <a:r>
-                <a:rPr lang="zh-CN" altLang="en-US" sz="1600" b="1">
-                  <a:solidFill>
-                    <a:schemeClr val="tx1"/>
-                  </a:solidFill>
-                  <a:latin typeface="Times New Roman" panose="02020603050405020304" charset="0"/>
-                  <a:ea typeface="宋体" panose="02010600030101010101" pitchFamily="2" charset="-122"/>
-                  <a:cs typeface="Times New Roman" panose="02020603050405020304" charset="0"/>
-                  <a:sym typeface="+mn-ea"/>
-                </a:rPr>
-                <a:t>逐片元操作</a:t>
-              </a:r>
-              <a:endParaRPr lang="zh-CN" altLang="en-US" sz="1600" b="1">
+          </a:ln>
+        </p:spPr>
+        <p:style>
+          <a:lnRef idx="2">
+            <a:schemeClr val="accent1">
+              <a:lumMod val="75000"/>
+            </a:schemeClr>
+          </a:lnRef>
+          <a:fillRef idx="1">
+            <a:schemeClr val="accent1"/>
+          </a:fillRef>
+          <a:effectRef idx="0">
+            <a:srgbClr val="FFFFFF"/>
+          </a:effectRef>
+          <a:fontRef idx="minor">
+            <a:schemeClr val="lt1"/>
+          </a:fontRef>
+        </p:style>
+        <p:txBody>
+          <a:bodyPr vertOverflow="overflow" horzOverflow="overflow" vert="horz" wrap="square" numCol="1" spcCol="0" rtlCol="0" fromWordArt="0" anchor="ctr" anchorCtr="0" forceAA="0" compatLnSpc="1">
+            <a:noAutofit/>
+          </a:bodyPr>
+          <a:p>
+            <a:pPr lvl="0" algn="ctr">
+              <a:buClrTx/>
+              <a:buSzTx/>
+              <a:buFontTx/>
+            </a:pPr>
+            <a:r>
+              <a:rPr lang="zh-CN" altLang="en-US" sz="1600">
                 <a:solidFill>
                   <a:schemeClr val="tx1"/>
                 </a:solidFill>
@@ -3366,197 +3341,207 @@
                 <a:ea typeface="宋体" panose="02010600030101010101" pitchFamily="2" charset="-122"/>
                 <a:cs typeface="Times New Roman" panose="02020603050405020304" charset="0"/>
                 <a:sym typeface="+mn-ea"/>
-              </a:endParaRPr>
-            </a:p>
-          </p:txBody>
-        </p:sp>
-        <p:cxnSp>
-          <p:nvCxnSpPr>
-            <p:cNvPr id="21" name="直接箭头连接符 20"/>
-            <p:cNvCxnSpPr>
-              <a:endCxn id="19" idx="1"/>
-            </p:cNvCxnSpPr>
-            <p:nvPr/>
-          </p:nvCxnSpPr>
-          <p:spPr>
-            <a:xfrm>
-              <a:off x="10631" y="3514"/>
-              <a:ext cx="1603" cy="0"/>
-            </a:xfrm>
-            <a:prstGeom prst="straightConnector1">
-              <a:avLst/>
-            </a:prstGeom>
-            <a:ln w="19050">
+              </a:rPr>
+              <a:t>逐片元操作</a:t>
+            </a:r>
+            <a:endParaRPr lang="zh-CN" altLang="en-US" sz="1600">
               <a:solidFill>
                 <a:schemeClr val="tx1"/>
               </a:solidFill>
-              <a:headEnd type="none"/>
-              <a:tailEnd type="triangle" w="med" len="med"/>
-            </a:ln>
-          </p:spPr>
-          <p:style>
-            <a:lnRef idx="2">
-              <a:schemeClr val="accent1"/>
-            </a:lnRef>
-            <a:fillRef idx="0">
-              <a:srgbClr val="FFFFFF"/>
-            </a:fillRef>
-            <a:effectRef idx="0">
-              <a:srgbClr val="FFFFFF"/>
-            </a:effectRef>
-            <a:fontRef idx="minor">
+              <a:latin typeface="Times New Roman" panose="02020603050405020304" charset="0"/>
+              <a:ea typeface="宋体" panose="02010600030101010101" pitchFamily="2" charset="-122"/>
+              <a:cs typeface="Times New Roman" panose="02020603050405020304" charset="0"/>
+              <a:sym typeface="+mn-ea"/>
+            </a:endParaRPr>
+          </a:p>
+        </p:txBody>
+      </p:sp>
+      <p:cxnSp>
+        <p:nvCxnSpPr>
+          <p:cNvPr id="21" name="直接箭头连接符 20"/>
+          <p:cNvCxnSpPr>
+            <a:endCxn id="19" idx="1"/>
+          </p:cNvCxnSpPr>
+          <p:nvPr/>
+        </p:nvCxnSpPr>
+        <p:spPr>
+          <a:xfrm>
+            <a:off x="6072505" y="847090"/>
+            <a:ext cx="1017905" cy="0"/>
+          </a:xfrm>
+          <a:prstGeom prst="straightConnector1">
+            <a:avLst/>
+          </a:prstGeom>
+          <a:ln w="19050">
+            <a:solidFill>
               <a:schemeClr val="tx1"/>
-            </a:fontRef>
-          </p:style>
-        </p:cxnSp>
-        <p:cxnSp>
-          <p:nvCxnSpPr>
-            <p:cNvPr id="32" name="直接箭头连接符 31"/>
-            <p:cNvCxnSpPr/>
-            <p:nvPr/>
-          </p:nvCxnSpPr>
-          <p:spPr>
-            <a:xfrm>
-              <a:off x="14242" y="3514"/>
-              <a:ext cx="1603" cy="0"/>
-            </a:xfrm>
-            <a:prstGeom prst="straightConnector1">
-              <a:avLst/>
-            </a:prstGeom>
-            <a:ln w="19050">
-              <a:solidFill>
-                <a:schemeClr val="tx1"/>
-              </a:solidFill>
-              <a:headEnd type="none"/>
-              <a:tailEnd type="triangle" w="med" len="med"/>
-            </a:ln>
-          </p:spPr>
-          <p:style>
-            <a:lnRef idx="2">
-              <a:schemeClr val="accent1"/>
-            </a:lnRef>
-            <a:fillRef idx="0">
-              <a:srgbClr val="FFFFFF"/>
-            </a:fillRef>
-            <a:effectRef idx="0">
-              <a:srgbClr val="FFFFFF"/>
-            </a:effectRef>
-            <a:fontRef idx="minor">
+            </a:solidFill>
+            <a:headEnd type="none"/>
+            <a:tailEnd type="triangle" w="med" len="med"/>
+          </a:ln>
+        </p:spPr>
+        <p:style>
+          <a:lnRef idx="2">
+            <a:schemeClr val="accent1"/>
+          </a:lnRef>
+          <a:fillRef idx="0">
+            <a:srgbClr val="FFFFFF"/>
+          </a:fillRef>
+          <a:effectRef idx="0">
+            <a:srgbClr val="FFFFFF"/>
+          </a:effectRef>
+          <a:fontRef idx="minor">
+            <a:schemeClr val="tx1"/>
+          </a:fontRef>
+        </p:style>
+      </p:cxnSp>
+      <p:cxnSp>
+        <p:nvCxnSpPr>
+          <p:cNvPr id="32" name="直接箭头连接符 31"/>
+          <p:cNvCxnSpPr/>
+          <p:nvPr/>
+        </p:nvCxnSpPr>
+        <p:spPr>
+          <a:xfrm>
+            <a:off x="8365490" y="847090"/>
+            <a:ext cx="1017905" cy="0"/>
+          </a:xfrm>
+          <a:prstGeom prst="straightConnector1">
+            <a:avLst/>
+          </a:prstGeom>
+          <a:ln w="19050">
+            <a:solidFill>
               <a:schemeClr val="tx1"/>
-            </a:fontRef>
-          </p:style>
-        </p:cxnSp>
-        <p:pic>
-          <p:nvPicPr>
-            <p:cNvPr id="5" name="图片 4"/>
-            <p:cNvPicPr>
-              <a:picLocks noChangeAspect="1"/>
-            </p:cNvPicPr>
-            <p:nvPr/>
-          </p:nvPicPr>
-          <p:blipFill>
-            <a:blip r:embed="rId1"/>
-            <a:stretch>
-              <a:fillRect/>
-            </a:stretch>
-          </p:blipFill>
-          <p:spPr>
-            <a:xfrm>
-              <a:off x="15845" y="3075"/>
-              <a:ext cx="1755" cy="923"/>
-            </a:xfrm>
-            <a:prstGeom prst="rect">
-              <a:avLst/>
-            </a:prstGeom>
-          </p:spPr>
-        </p:pic>
-        <p:sp>
-          <p:nvSpPr>
-            <p:cNvPr id="9" name="文本框 8"/>
-            <p:cNvSpPr txBox="1"/>
-            <p:nvPr/>
-          </p:nvSpPr>
-          <p:spPr>
-            <a:xfrm>
-              <a:off x="7464" y="2401"/>
-              <a:ext cx="2136" cy="531"/>
-            </a:xfrm>
-            <a:prstGeom prst="rect">
-              <a:avLst/>
-            </a:prstGeom>
-            <a:noFill/>
-          </p:spPr>
-          <p:txBody>
-            <a:bodyPr wrap="square" rtlCol="0">
-              <a:spAutoFit/>
-            </a:bodyPr>
-            <a:p>
-              <a:r>
-                <a:rPr lang="zh-CN" altLang="en-US" sz="1600" b="1">
-                  <a:solidFill>
-                    <a:schemeClr val="tx1"/>
-                  </a:solidFill>
-                  <a:latin typeface="宋体" panose="02010600030101010101" pitchFamily="2" charset="-122"/>
-                  <a:ea typeface="宋体" panose="02010600030101010101" pitchFamily="2" charset="-122"/>
-                  <a:sym typeface="+mn-ea"/>
-                </a:rPr>
-                <a:t>光栅化阶段</a:t>
-              </a:r>
-              <a:endParaRPr lang="zh-CN" altLang="en-US" sz="1600" b="1">
+            </a:solidFill>
+            <a:headEnd type="none"/>
+            <a:tailEnd type="triangle" w="med" len="med"/>
+          </a:ln>
+        </p:spPr>
+        <p:style>
+          <a:lnRef idx="2">
+            <a:schemeClr val="accent1"/>
+          </a:lnRef>
+          <a:fillRef idx="0">
+            <a:srgbClr val="FFFFFF"/>
+          </a:fillRef>
+          <a:effectRef idx="0">
+            <a:srgbClr val="FFFFFF"/>
+          </a:effectRef>
+          <a:fontRef idx="minor">
+            <a:schemeClr val="tx1"/>
+          </a:fontRef>
+        </p:style>
+      </p:cxnSp>
+      <p:pic>
+        <p:nvPicPr>
+          <p:cNvPr id="5" name="图片 4"/>
+          <p:cNvPicPr>
+            <a:picLocks noChangeAspect="1"/>
+          </p:cNvPicPr>
+          <p:nvPr/>
+        </p:nvPicPr>
+        <p:blipFill>
+          <a:blip r:embed="rId1"/>
+          <a:stretch>
+            <a:fillRect/>
+          </a:stretch>
+        </p:blipFill>
+        <p:spPr>
+          <a:xfrm>
+            <a:off x="9383395" y="568325"/>
+            <a:ext cx="1114425" cy="586105"/>
+          </a:xfrm>
+          <a:prstGeom prst="rect">
+            <a:avLst/>
+          </a:prstGeom>
+        </p:spPr>
+      </p:pic>
+      <p:sp>
+        <p:nvSpPr>
+          <p:cNvPr id="9" name="文本框 8"/>
+          <p:cNvSpPr txBox="1"/>
+          <p:nvPr/>
+        </p:nvSpPr>
+        <p:spPr>
+          <a:xfrm>
+            <a:off x="4061460" y="140335"/>
+            <a:ext cx="1356360" cy="337185"/>
+          </a:xfrm>
+          <a:prstGeom prst="rect">
+            <a:avLst/>
+          </a:prstGeom>
+          <a:noFill/>
+        </p:spPr>
+        <p:txBody>
+          <a:bodyPr wrap="square" rtlCol="0">
+            <a:spAutoFit/>
+          </a:bodyPr>
+          <a:p>
+            <a:r>
+              <a:rPr lang="zh-CN" altLang="en-US" sz="1600">
                 <a:solidFill>
                   <a:schemeClr val="tx1"/>
                 </a:solidFill>
                 <a:latin typeface="宋体" panose="02010600030101010101" pitchFamily="2" charset="-122"/>
                 <a:ea typeface="宋体" panose="02010600030101010101" pitchFamily="2" charset="-122"/>
                 <a:sym typeface="+mn-ea"/>
-              </a:endParaRPr>
-            </a:p>
-          </p:txBody>
-        </p:sp>
-        <p:sp>
-          <p:nvSpPr>
-            <p:cNvPr id="14" name="文本框 13"/>
-            <p:cNvSpPr txBox="1"/>
-            <p:nvPr/>
-          </p:nvSpPr>
-          <p:spPr>
-            <a:xfrm>
-              <a:off x="15935" y="2562"/>
-              <a:ext cx="1855" cy="531"/>
-            </a:xfrm>
-            <a:prstGeom prst="rect">
-              <a:avLst/>
-            </a:prstGeom>
-            <a:noFill/>
-          </p:spPr>
-          <p:txBody>
-            <a:bodyPr wrap="square" rtlCol="0">
-              <a:spAutoFit/>
-            </a:bodyPr>
-            <a:p>
-              <a:r>
-                <a:rPr lang="zh-CN" altLang="en-US" sz="1600" b="1">
-                  <a:solidFill>
-                    <a:schemeClr val="tx1"/>
-                  </a:solidFill>
-                  <a:latin typeface="宋体" panose="02010600030101010101" pitchFamily="2" charset="-122"/>
-                  <a:ea typeface="宋体" panose="02010600030101010101" pitchFamily="2" charset="-122"/>
-                  <a:sym typeface="+mn-ea"/>
-                </a:rPr>
-                <a:t>屏幕图像</a:t>
-              </a:r>
-              <a:endParaRPr lang="zh-CN" altLang="en-US" sz="1600" b="1">
+              </a:rPr>
+              <a:t>光栅化阶段</a:t>
+            </a:r>
+            <a:endParaRPr lang="zh-CN" altLang="en-US" sz="1600">
+              <a:solidFill>
+                <a:schemeClr val="tx1"/>
+              </a:solidFill>
+              <a:latin typeface="宋体" panose="02010600030101010101" pitchFamily="2" charset="-122"/>
+              <a:ea typeface="宋体" panose="02010600030101010101" pitchFamily="2" charset="-122"/>
+              <a:sym typeface="+mn-ea"/>
+            </a:endParaRPr>
+          </a:p>
+        </p:txBody>
+      </p:sp>
+      <p:sp>
+        <p:nvSpPr>
+          <p:cNvPr id="14" name="文本框 13"/>
+          <p:cNvSpPr txBox="1"/>
+          <p:nvPr/>
+        </p:nvSpPr>
+        <p:spPr>
+          <a:xfrm>
+            <a:off x="9440545" y="242570"/>
+            <a:ext cx="1177925" cy="337185"/>
+          </a:xfrm>
+          <a:prstGeom prst="rect">
+            <a:avLst/>
+          </a:prstGeom>
+          <a:noFill/>
+        </p:spPr>
+        <p:txBody>
+          <a:bodyPr wrap="square" rtlCol="0">
+            <a:spAutoFit/>
+          </a:bodyPr>
+          <a:p>
+            <a:r>
+              <a:rPr lang="zh-CN" altLang="en-US" sz="1600">
                 <a:solidFill>
                   <a:schemeClr val="tx1"/>
                 </a:solidFill>
                 <a:latin typeface="宋体" panose="02010600030101010101" pitchFamily="2" charset="-122"/>
                 <a:ea typeface="宋体" panose="02010600030101010101" pitchFamily="2" charset="-122"/>
                 <a:sym typeface="+mn-ea"/>
-              </a:endParaRPr>
-            </a:p>
-          </p:txBody>
-        </p:sp>
-      </p:grpSp>
+              </a:rPr>
+              <a:t>屏幕图像</a:t>
+            </a:r>
+            <a:endParaRPr lang="zh-CN" altLang="en-US" sz="1600">
+              <a:solidFill>
+                <a:schemeClr val="tx1"/>
+              </a:solidFill>
+              <a:latin typeface="宋体" panose="02010600030101010101" pitchFamily="2" charset="-122"/>
+              <a:ea typeface="宋体" panose="02010600030101010101" pitchFamily="2" charset="-122"/>
+              <a:sym typeface="+mn-ea"/>
+            </a:endParaRPr>
+          </a:p>
+        </p:txBody>
+      </p:sp>
     </p:spTree>
   </p:cSld>
   <p:clrMapOvr>
